--- a/documents/Sprint3/Sprint_Review3_431-2.pptx
+++ b/documents/Sprint3/Sprint_Review3_431-2.pptx
@@ -7072,7 +7072,7 @@
         </p:nvGraphicFramePr>
         <p:xfrm>
           <a:off x="2100387" y="3060700"/>
-          <a:ext cx="7922524" cy="3081020"/>
+          <a:ext cx="7922524" cy="3248660"/>
         </p:xfrm>
         <a:graphic>
           <a:graphicData uri="http://schemas.openxmlformats.org/drawingml/2006/table">
@@ -7438,12 +7438,12 @@
                         <a:buNone/>
                       </a:pPr>
                       <a:r>
-                        <a:rPr lang="ca-ES" sz="1100" b="1">
+                        <a:rPr lang="ca-ES" sz="1100" b="1" dirty="0">
                           <a:effectLst/>
                         </a:rPr>
                         <a:t>Actors</a:t>
                       </a:r>
-                      <a:endParaRPr lang="ca-ES" sz="1000" b="1">
+                      <a:endParaRPr lang="ca-ES" sz="1000" b="1" dirty="0">
                         <a:effectLst/>
                         <a:latin typeface="Times New Roman" panose="02020603050405020304" pitchFamily="18" charset="0"/>
                         <a:ea typeface="Times New Roman" panose="02020603050405020304" pitchFamily="18" charset="0"/>
@@ -7461,12 +7461,12 @@
                         <a:buNone/>
                       </a:pPr>
                       <a:r>
-                        <a:rPr lang="ca-ES" sz="1100">
+                        <a:rPr lang="ca-ES" sz="1100" dirty="0">
                           <a:effectLst/>
                         </a:rPr>
                         <a:t>Alumne, Professor, PAS.</a:t>
                       </a:r>
-                      <a:endParaRPr lang="ca-ES" sz="1000">
+                      <a:endParaRPr lang="ca-ES" sz="1000" dirty="0">
                         <a:effectLst/>
                         <a:latin typeface="Times New Roman" panose="02020603050405020304" pitchFamily="18" charset="0"/>
                         <a:ea typeface="Times New Roman" panose="02020603050405020304" pitchFamily="18" charset="0"/>
@@ -7534,12 +7534,12 @@
                         <a:buNone/>
                       </a:pPr>
                       <a:r>
-                        <a:rPr lang="ca-ES" sz="1100">
+                        <a:rPr lang="ca-ES" sz="1100" dirty="0">
                           <a:effectLst/>
                         </a:rPr>
                         <a:t> </a:t>
                       </a:r>
-                      <a:endParaRPr lang="ca-ES" sz="1000">
+                      <a:endParaRPr lang="ca-ES" sz="1000" dirty="0">
                         <a:effectLst/>
                         <a:latin typeface="Times New Roman" panose="02020603050405020304" pitchFamily="18" charset="0"/>
                         <a:ea typeface="Times New Roman" panose="02020603050405020304" pitchFamily="18" charset="0"/>
@@ -7611,12 +7611,24 @@
                         </a:tabLst>
                       </a:pPr>
                       <a:r>
-                        <a:rPr lang="ca-ES" sz="1100">
+                        <a:rPr lang="ca-ES" sz="1100" dirty="0">
                           <a:effectLst/>
                         </a:rPr>
-                        <a:t>El sistema valida el codi d’usuari i password introduïts.</a:t>
+                        <a:t>El sistema valida el codi d’usuari i </a:t>
                       </a:r>
-                      <a:endParaRPr lang="ca-ES" sz="1000">
+                      <a:r>
+                        <a:rPr lang="ca-ES" sz="1100" dirty="0" err="1">
+                          <a:effectLst/>
+                        </a:rPr>
+                        <a:t>password</a:t>
+                      </a:r>
+                      <a:r>
+                        <a:rPr lang="ca-ES" sz="1100" dirty="0">
+                          <a:effectLst/>
+                        </a:rPr>
+                        <a:t> introduïts.</a:t>
+                      </a:r>
+                      <a:endParaRPr lang="ca-ES" sz="1000" dirty="0">
                         <a:effectLst/>
                       </a:endParaRPr>
                     </a:p>
@@ -7629,18 +7641,18 @@
                         </a:tabLst>
                       </a:pPr>
                       <a:r>
-                        <a:rPr lang="ca-ES" sz="1100">
+                        <a:rPr lang="ca-ES" sz="1100" dirty="0">
                           <a:effectLst/>
                         </a:rPr>
                         <a:t>El sistema mostra el menú principal segons el perfil d’usuari.</a:t>
                       </a:r>
                       <a:r>
-                        <a:rPr lang="ca-ES" sz="1000">
+                        <a:rPr lang="ca-ES" sz="1000" dirty="0">
                           <a:effectLst/>
                         </a:rPr>
                         <a:t> </a:t>
                       </a:r>
-                      <a:endParaRPr lang="ca-ES" sz="1000">
+                      <a:endParaRPr lang="ca-ES" sz="1000" dirty="0">
                         <a:effectLst/>
                         <a:latin typeface="Times New Roman" panose="02020603050405020304" pitchFamily="18" charset="0"/>
                         <a:ea typeface="Times New Roman" panose="02020603050405020304" pitchFamily="18" charset="0"/>
@@ -7708,12 +7720,12 @@
                         <a:buNone/>
                       </a:pPr>
                       <a:r>
-                        <a:rPr lang="ca-ES" sz="1100">
+                        <a:rPr lang="ca-ES" sz="1100" dirty="0">
                           <a:effectLst/>
                         </a:rPr>
                         <a:t> </a:t>
                       </a:r>
-                      <a:endParaRPr lang="ca-ES" sz="1000">
+                      <a:endParaRPr lang="ca-ES" sz="1000" dirty="0">
                         <a:effectLst/>
                         <a:latin typeface="Times New Roman" panose="02020603050405020304" pitchFamily="18" charset="0"/>
                         <a:ea typeface="Times New Roman" panose="02020603050405020304" pitchFamily="18" charset="0"/>
@@ -7787,12 +7799,24 @@
                         <a:buNone/>
                       </a:pPr>
                       <a:r>
-                        <a:rPr lang="ca-ES" sz="1100" u="sng">
+                        <a:rPr lang="ca-ES" sz="1100" u="sng" dirty="0">
                           <a:effectLst/>
                         </a:rPr>
-                        <a:t>Nom d’usuari / password incorrectes</a:t>
+                        <a:t>Nom d’usuari / </a:t>
                       </a:r>
-                      <a:endParaRPr lang="ca-ES" sz="1200">
+                      <a:r>
+                        <a:rPr lang="ca-ES" sz="1100" u="sng" dirty="0" err="1">
+                          <a:effectLst/>
+                        </a:rPr>
+                        <a:t>password</a:t>
+                      </a:r>
+                      <a:r>
+                        <a:rPr lang="ca-ES" sz="1100" u="sng" dirty="0">
+                          <a:effectLst/>
+                        </a:rPr>
+                        <a:t> incorrectes</a:t>
+                      </a:r>
+                      <a:endParaRPr lang="ca-ES" sz="1200" dirty="0">
                         <a:effectLst/>
                       </a:endParaRPr>
                     </a:p>
@@ -7801,12 +7825,12 @@
                         <a:buNone/>
                       </a:pPr>
                       <a:r>
-                        <a:rPr lang="ca-ES" sz="1100">
+                        <a:rPr lang="ca-ES" sz="1100" dirty="0">
                           <a:effectLst/>
                         </a:rPr>
                         <a:t>Si la identificació d’usuari és incorrecta, es mostra un missatge d’error demanant a l’usuari que torni a entrar les dades o cancel·li l’operació. En aquest últim cas, el cas d’ús acaba.</a:t>
                       </a:r>
-                      <a:endParaRPr lang="ca-ES" sz="1000">
+                      <a:endParaRPr lang="ca-ES" sz="1000" dirty="0">
                         <a:effectLst/>
                         <a:latin typeface="Times New Roman" panose="02020603050405020304" pitchFamily="18" charset="0"/>
                         <a:ea typeface="Times New Roman" panose="02020603050405020304" pitchFamily="18" charset="0"/>
@@ -7851,12 +7875,12 @@
                         <a:buNone/>
                       </a:pPr>
                       <a:r>
-                        <a:rPr lang="ca-ES" sz="1100" b="1">
+                        <a:rPr lang="ca-ES" sz="1100" b="1" dirty="0" err="1">
                           <a:effectLst/>
                         </a:rPr>
                         <a:t>Postcondició</a:t>
                       </a:r>
-                      <a:endParaRPr lang="ca-ES" sz="1000" b="1">
+                      <a:endParaRPr lang="ca-ES" sz="1000" b="1" dirty="0">
                         <a:effectLst/>
                         <a:latin typeface="Times New Roman" panose="02020603050405020304" pitchFamily="18" charset="0"/>
                         <a:ea typeface="Times New Roman" panose="02020603050405020304" pitchFamily="18" charset="0"/>
@@ -7874,12 +7898,12 @@
                         <a:buNone/>
                       </a:pPr>
                       <a:r>
-                        <a:rPr lang="ca-ES" sz="1100">
+                        <a:rPr lang="ca-ES" sz="1100" dirty="0">
                           <a:effectLst/>
                         </a:rPr>
                         <a:t> </a:t>
                       </a:r>
-                      <a:endParaRPr lang="ca-ES" sz="1000">
+                      <a:endParaRPr lang="ca-ES" sz="1000" dirty="0">
                         <a:effectLst/>
                         <a:latin typeface="Times New Roman" panose="02020603050405020304" pitchFamily="18" charset="0"/>
                         <a:ea typeface="Times New Roman" panose="02020603050405020304" pitchFamily="18" charset="0"/>
@@ -7947,12 +7971,12 @@
                         <a:buNone/>
                       </a:pPr>
                       <a:r>
-                        <a:rPr lang="ca-ES" sz="1100">
+                        <a:rPr lang="ca-ES" sz="1100" dirty="0">
                           <a:effectLst/>
                         </a:rPr>
                         <a:t> </a:t>
                       </a:r>
-                      <a:endParaRPr lang="ca-ES" sz="1000">
+                      <a:endParaRPr lang="ca-ES" sz="1000" dirty="0">
                         <a:effectLst/>
                         <a:latin typeface="Times New Roman" panose="02020603050405020304" pitchFamily="18" charset="0"/>
                         <a:ea typeface="Times New Roman" panose="02020603050405020304" pitchFamily="18" charset="0"/>
@@ -8020,12 +8044,12 @@
                         <a:buNone/>
                       </a:pPr>
                       <a:r>
-                        <a:rPr lang="ca-ES" sz="1100">
+                        <a:rPr lang="ca-ES" sz="1100" dirty="0">
                           <a:effectLst/>
                         </a:rPr>
                         <a:t>Normal</a:t>
                       </a:r>
-                      <a:endParaRPr lang="ca-ES" sz="1000">
+                      <a:endParaRPr lang="ca-ES" sz="1000" dirty="0">
                         <a:effectLst/>
                         <a:latin typeface="Times New Roman" panose="02020603050405020304" pitchFamily="18" charset="0"/>
                         <a:ea typeface="Times New Roman" panose="02020603050405020304" pitchFamily="18" charset="0"/>
@@ -9691,6 +9715,15 @@
 </file>
 
 <file path=customXml/item1.xml><?xml version="1.0" encoding="utf-8"?>
+<?mso-contentType ?>
+<FormTemplates xmlns="http://schemas.microsoft.com/sharepoint/v3/contenttype/forms">
+  <Display>DocumentLibraryForm</Display>
+  <Edit>DocumentLibraryForm</Edit>
+  <New>DocumentLibraryForm</New>
+</FormTemplates>
+</file>
+
+<file path=customXml/item2.xml><?xml version="1.0" encoding="utf-8"?>
 <ct:contentTypeSchema xmlns:ct="http://schemas.microsoft.com/office/2006/metadata/contentType" xmlns:ma="http://schemas.microsoft.com/office/2006/metadata/properties/metaAttributes" ct:_="" ma:_="" ma:contentTypeName="Documento" ma:contentTypeID="0x01010063BD3DC6F0E81D4FA56575A4B7B24AF5" ma:contentTypeVersion="14" ma:contentTypeDescription="Crear nuevo documento." ma:contentTypeScope="" ma:versionID="ded3d347f3a98b31a82ee0cc093f824b">
   <xsd:schema xmlns:xsd="http://www.w3.org/2001/XMLSchema" xmlns:xs="http://www.w3.org/2001/XMLSchema" xmlns:p="http://schemas.microsoft.com/office/2006/metadata/properties" xmlns:ns3="7b814fa0-4f1b-4d56-8a36-064af1e36e66" xmlns:ns4="b1fa7ccf-aa4f-4f27-84db-07667d020acb" targetNamespace="http://schemas.microsoft.com/office/2006/metadata/properties" ma:root="true" ma:fieldsID="fe3adeea5df1e60fd0d7c7fb86895927" ns3:_="" ns4:_="">
     <xsd:import namespace="7b814fa0-4f1b-4d56-8a36-064af1e36e66"/>
@@ -9919,15 +9952,6 @@
 </ct:contentTypeSchema>
 </file>
 
-<file path=customXml/item2.xml><?xml version="1.0" encoding="utf-8"?>
-<?mso-contentType ?>
-<FormTemplates xmlns="http://schemas.microsoft.com/sharepoint/v3/contenttype/forms">
-  <Display>DocumentLibraryForm</Display>
-  <Edit>DocumentLibraryForm</Edit>
-  <New>DocumentLibraryForm</New>
-</FormTemplates>
-</file>
-
 <file path=customXml/item3.xml><?xml version="1.0" encoding="utf-8"?>
 <p:properties xmlns:p="http://schemas.microsoft.com/office/2006/metadata/properties" xmlns:xsi="http://www.w3.org/2001/XMLSchema-instance" xmlns:pc="http://schemas.microsoft.com/office/infopath/2007/PartnerControls">
   <documentManagement>
@@ -9944,6 +9968,14 @@
 </file>
 
 <file path=customXml/itemProps1.xml><?xml version="1.0" encoding="utf-8"?>
+<ds:datastoreItem xmlns:ds="http://schemas.openxmlformats.org/officeDocument/2006/customXml" ds:itemID="{04171512-FDE1-4E49-B7EA-58AD2B333724}">
+  <ds:schemaRefs>
+    <ds:schemaRef ds:uri="http://schemas.microsoft.com/sharepoint/v3/contenttype/forms"/>
+  </ds:schemaRefs>
+</ds:datastoreItem>
+</file>
+
+<file path=customXml/itemProps2.xml><?xml version="1.0" encoding="utf-8"?>
 <ds:datastoreItem xmlns:ds="http://schemas.openxmlformats.org/officeDocument/2006/customXml" ds:itemID="{E77A2FCE-FB77-4A2D-98B9-B8BD51BEE8CE}">
   <ds:schemaRefs>
     <ds:schemaRef ds:uri="http://schemas.microsoft.com/office/2006/metadata/contentType"/>
@@ -9958,14 +9990,6 @@
     <ds:schemaRef ds:uri="http://purl.org/dc/elements/1.1/"/>
     <ds:schemaRef ds:uri="http://purl.org/dc/terms/"/>
     <ds:schemaRef ds:uri="http://schemas.microsoft.com/internal/obd"/>
-  </ds:schemaRefs>
-</ds:datastoreItem>
-</file>
-
-<file path=customXml/itemProps2.xml><?xml version="1.0" encoding="utf-8"?>
-<ds:datastoreItem xmlns:ds="http://schemas.openxmlformats.org/officeDocument/2006/customXml" ds:itemID="{04171512-FDE1-4E49-B7EA-58AD2B333724}">
-  <ds:schemaRefs>
-    <ds:schemaRef ds:uri="http://schemas.microsoft.com/sharepoint/v3/contenttype/forms"/>
   </ds:schemaRefs>
 </ds:datastoreItem>
 </file>
